--- a/guides/pitches/product-output/MyScoutee_Product_Pitch_v1.0.0_EN.pptx
+++ b/guides/pitches/product-output/MyScoutee_Product_Pitch_v1.0.0_EN.pptx
@@ -70,7 +70,7 @@
         <p:txBody>
           <a:bodyPr/>
           <a:p>
-            <a:fld id="{21FB623B-DBA5-49EA-A39F-C99A0DF891EF}" type="slidenum">
+            <a:fld id="{10D51E7E-05A0-402A-B1EC-FA76C7AFBE87}" type="slidenum">
               <a:t>&lt;#&gt;</a:t>
             </a:fld>
           </a:p>
@@ -258,7 +258,7 @@
         <p:txBody>
           <a:bodyPr/>
           <a:p>
-            <a:fld id="{0B831D77-B59B-4A85-AE9B-DC4C7465AFB8}" type="slidenum">
+            <a:fld id="{8076E064-C558-4A25-8777-71445FC8C7C4}" type="slidenum">
               <a:t>&lt;#&gt;</a:t>
             </a:fld>
           </a:p>
@@ -514,7 +514,7 @@
         <p:txBody>
           <a:bodyPr/>
           <a:p>
-            <a:fld id="{0215B0F7-784D-4B06-972A-84979D87CE8E}" type="slidenum">
+            <a:fld id="{08FC6804-A679-462E-B83A-CBDA38379EA4}" type="slidenum">
               <a:t>&lt;#&gt;</a:t>
             </a:fld>
           </a:p>
@@ -838,7 +838,7 @@
         <p:txBody>
           <a:bodyPr/>
           <a:p>
-            <a:fld id="{0CE94410-CCBF-4ECC-8EA3-3D71BCA9BBB0}" type="slidenum">
+            <a:fld id="{FD1D488E-D8D8-491C-9562-DEB3EAEEE332}" type="slidenum">
               <a:t>&lt;#&gt;</a:t>
             </a:fld>
           </a:p>
@@ -995,7 +995,7 @@
         <p:txBody>
           <a:bodyPr/>
           <a:p>
-            <a:fld id="{BEC18E97-7353-4A8E-8D24-1119BD795C46}" type="slidenum">
+            <a:fld id="{69E65B5A-A6B9-4F24-A1BD-13DE6741F10A}" type="slidenum">
               <a:t>&lt;#&gt;</a:t>
             </a:fld>
           </a:p>
@@ -1149,7 +1149,7 @@
         <p:txBody>
           <a:bodyPr/>
           <a:p>
-            <a:fld id="{379AF2CC-767A-4213-81E8-42A8A2804866}" type="slidenum">
+            <a:fld id="{D2D1D07F-A3FD-404E-9882-5E9ACA6775C7}" type="slidenum">
               <a:t>&lt;#&gt;</a:t>
             </a:fld>
           </a:p>
@@ -1337,7 +1337,7 @@
         <p:txBody>
           <a:bodyPr/>
           <a:p>
-            <a:fld id="{C75C6377-8A25-4791-9EA8-5519D414B3F1}" type="slidenum">
+            <a:fld id="{67D32C12-F1C7-4681-82F1-22C0FA450F1B}" type="slidenum">
               <a:t>&lt;#&gt;</a:t>
             </a:fld>
           </a:p>
@@ -1457,7 +1457,7 @@
         <p:txBody>
           <a:bodyPr/>
           <a:p>
-            <a:fld id="{8B0018C7-0DC3-4BD5-BCAE-924FAF5BC0D7}" type="slidenum">
+            <a:fld id="{74483B38-9BF2-412E-903A-B638C0595AF5}" type="slidenum">
               <a:t>&lt;#&gt;</a:t>
             </a:fld>
           </a:p>
@@ -1577,7 +1577,7 @@
         <p:txBody>
           <a:bodyPr/>
           <a:p>
-            <a:fld id="{2B0E35AB-F107-4060-9EA0-9D4F13AB23A9}" type="slidenum">
+            <a:fld id="{E57B26A8-0AD3-488E-A941-6ADF0F750B31}" type="slidenum">
               <a:t>&lt;#&gt;</a:t>
             </a:fld>
           </a:p>
@@ -1799,7 +1799,7 @@
         <p:txBody>
           <a:bodyPr/>
           <a:p>
-            <a:fld id="{0F3AFA85-F2DE-4420-A0F3-3B1070BC01E8}" type="slidenum">
+            <a:fld id="{AECC764A-C25F-4A09-BD88-8E23CA8D0EAD}" type="slidenum">
               <a:t>&lt;#&gt;</a:t>
             </a:fld>
           </a:p>
@@ -2021,7 +2021,7 @@
         <p:txBody>
           <a:bodyPr/>
           <a:p>
-            <a:fld id="{D843F6D5-F584-4D4F-83DC-C2BEA04AA8A9}" type="slidenum">
+            <a:fld id="{3BC4F037-6A5B-40BA-9323-8F005325B4C9}" type="slidenum">
               <a:t>&lt;#&gt;</a:t>
             </a:fld>
           </a:p>
@@ -2243,7 +2243,7 @@
         <p:txBody>
           <a:bodyPr/>
           <a:p>
-            <a:fld id="{408F9159-6270-4ACC-AAAF-8C9C59D74807}" type="slidenum">
+            <a:fld id="{4487DBE2-1B6A-49FB-A52B-E52D798A8F93}" type="slidenum">
               <a:t>&lt;#&gt;</a:t>
             </a:fld>
           </a:p>
@@ -2655,7 +2655,7 @@
             <a:pPr algn="r">
               <a:buNone/>
             </a:pPr>
-            <a:fld id="{512CB336-7AFD-4C3C-ABD6-41FEB8D5429C}" type="slidenum">
+            <a:fld id="{7EE68C04-D500-4BCB-AFCB-A7C50ED89307}" type="slidenum">
               <a:rPr b="0" lang="en-US" sz="1400" spc="-1" strike="noStrike">
                 <a:latin typeface="Times New Roman"/>
               </a:rPr>
